--- a/Assignment.pptx
+++ b/Assignment.pptx
@@ -115,7 +115,7 @@
 <file path=ppt/revisionInfo.xml><?xml version="1.0" encoding="utf-8"?>
 <p1510:revInfo xmlns:a="http://schemas.openxmlformats.org/drawingml/2006/main" xmlns:r="http://schemas.openxmlformats.org/officeDocument/2006/relationships" xmlns:p1510="http://schemas.microsoft.com/office/powerpoint/2015/10/main">
   <p1510:revLst>
-    <p1510:client id="{46C5571B-0815-4303-ACFA-D11E4F56A021}" v="10" dt="2026-03-20T19:10:15.738"/>
+    <p1510:client id="{46C5571B-0815-4303-ACFA-D11E4F56A021}" v="12" dt="2026-03-20T19:38:27.852"/>
   </p1510:revLst>
 </p1510:revInfo>
 </file>
@@ -125,7 +125,7 @@
   <pc:docChgLst>
     <pc:chgData name="Tom Glynn" userId="7b80944d-1e93-41c3-aa5b-c1c1d09e6091" providerId="ADAL" clId="{98CCD932-5ADB-4882-9D45-96141E4E64DA}"/>
     <pc:docChg chg="undo custSel addSld delSld modSld sldOrd">
-      <pc:chgData name="Tom Glynn" userId="7b80944d-1e93-41c3-aa5b-c1c1d09e6091" providerId="ADAL" clId="{98CCD932-5ADB-4882-9D45-96141E4E64DA}" dt="2026-03-20T19:10:58.154" v="2218" actId="1076"/>
+      <pc:chgData name="Tom Glynn" userId="7b80944d-1e93-41c3-aa5b-c1c1d09e6091" providerId="ADAL" clId="{98CCD932-5ADB-4882-9D45-96141E4E64DA}" dt="2026-03-20T19:39:00.183" v="2599" actId="20577"/>
       <pc:docMkLst>
         <pc:docMk/>
       </pc:docMkLst>
@@ -245,7 +245,7 @@
         </pc:sldMkLst>
       </pc:sldChg>
       <pc:sldChg chg="modSp add mod">
-        <pc:chgData name="Tom Glynn" userId="7b80944d-1e93-41c3-aa5b-c1c1d09e6091" providerId="ADAL" clId="{98CCD932-5ADB-4882-9D45-96141E4E64DA}" dt="2026-03-20T19:10:58.154" v="2218" actId="1076"/>
+        <pc:chgData name="Tom Glynn" userId="7b80944d-1e93-41c3-aa5b-c1c1d09e6091" providerId="ADAL" clId="{98CCD932-5ADB-4882-9D45-96141E4E64DA}" dt="2026-03-20T19:39:00.183" v="2599" actId="20577"/>
         <pc:sldMkLst>
           <pc:docMk/>
           <pc:sldMk cId="3469089021" sldId="261"/>
@@ -259,7 +259,7 @@
           </ac:spMkLst>
         </pc:spChg>
         <pc:spChg chg="mod">
-          <ac:chgData name="Tom Glynn" userId="7b80944d-1e93-41c3-aa5b-c1c1d09e6091" providerId="ADAL" clId="{98CCD932-5ADB-4882-9D45-96141E4E64DA}" dt="2026-03-20T19:10:58.154" v="2218" actId="1076"/>
+          <ac:chgData name="Tom Glynn" userId="7b80944d-1e93-41c3-aa5b-c1c1d09e6091" providerId="ADAL" clId="{98CCD932-5ADB-4882-9D45-96141E4E64DA}" dt="2026-03-20T19:39:00.183" v="2599" actId="20577"/>
           <ac:spMkLst>
             <pc:docMk/>
             <pc:sldMk cId="3469089021" sldId="261"/>
@@ -4587,50 +4587,74 @@
         </p:spPr>
         <p:txBody>
           <a:bodyPr>
-            <a:normAutofit fontScale="92500" lnSpcReduction="10000"/>
+            <a:normAutofit/>
           </a:bodyPr>
           <a:lstStyle/>
           <a:p>
             <a:pPr algn="l"/>
             <a:r>
+              <a:rPr lang="en-GB" b="1" dirty="0"/>
+              <a:t>To assess results the metrics used include: </a:t>
+            </a:r>
+          </a:p>
+          <a:p>
+            <a:pPr marL="342900" indent="-342900" algn="l">
+              <a:buFont typeface="Arial" panose="020B0604020202020204" pitchFamily="34" charset="0"/>
+              <a:buChar char="•"/>
+            </a:pPr>
+            <a:r>
+              <a:rPr lang="en-GB" b="1" dirty="0"/>
+              <a:t>Accuracy Score: </a:t>
+            </a:r>
+          </a:p>
+          <a:p>
+            <a:pPr marL="342900" indent="-342900" algn="l">
+              <a:buFont typeface="Arial" panose="020B0604020202020204" pitchFamily="34" charset="0"/>
+              <a:buChar char="•"/>
+            </a:pPr>
+            <a:r>
+              <a:rPr lang="en-GB" b="1" dirty="0"/>
+              <a:t>Brier Score: </a:t>
+            </a:r>
+            <a:r>
               <a:rPr lang="en-GB" dirty="0"/>
-              <a:t>The dataset is from an observational cross-sectional study on women who underwent diagnostic evaluation (fine-needle aspiration) to assess if their breast cancer tumour were benign or malignant. They were recorded within the Wisconsin Breast Cancer Diagnostic database in the 1990’s. Information around the dataset is available in the </a:t>
-            </a:r>
-            <a:r>
-              <a:rPr lang="en-GB" i="1" dirty="0"/>
-              <a:t>“Nuclear Feature Extraction for Breast </a:t>
-            </a:r>
-            <a:r>
-              <a:rPr lang="en-GB" i="1" dirty="0" err="1"/>
-              <a:t>Tumor</a:t>
-            </a:r>
-            <a:r>
-              <a:rPr lang="en-GB" i="1" dirty="0"/>
-              <a:t> Diagnosis”</a:t>
-            </a:r>
-            <a:r>
-              <a:rPr lang="en-GB" dirty="0"/>
-              <a:t> study. </a:t>
-            </a:r>
-          </a:p>
-          <a:p>
-            <a:pPr algn="l"/>
-            <a:r>
-              <a:rPr lang="en-GB" dirty="0"/>
-              <a:t>The dataset contains 569 observations and 30 predictor variables (cell nuclei features (such as the radius, perimeter, area, compactness, smoothness, concavity, concave points, symmetry, fractal dimension and texture) each measured three ways (mean, standard error, and largest value) ), and a binary outcome classifying 357 benign and 212 malignant tumours overall. There are no missing values.</a:t>
-            </a:r>
-          </a:p>
-          <a:p>
-            <a:pPr algn="l"/>
+              <a:t>Considers both discrimination (ability to differentiate cases) &amp; calibration (are the predicted probabilities correct?) where lower values indicate </a:t>
+            </a:r>
+            <a:r>
+              <a:rPr lang="en-GB"/>
+              <a:t>better performance. </a:t>
+            </a:r>
             <a:endParaRPr lang="en-GB" dirty="0"/>
           </a:p>
           <a:p>
-            <a:pPr algn="l"/>
-            <a:r>
-              <a:rPr lang="en-GB" dirty="0"/>
-              <a:t>All confusion tables &amp; accuracy scores were assess with a classification threshold of  0.3 prioritizing sensitivity (minimising false negatives). This is because the risk of a false negative out ways a false positive. </a:t>
-            </a:r>
-            <a:endParaRPr lang="en-GB" b="1" dirty="0"/>
+            <a:pPr marL="342900" indent="-342900" algn="l">
+              <a:buFont typeface="Arial" panose="020B0604020202020204" pitchFamily="34" charset="0"/>
+              <a:buChar char="•"/>
+            </a:pPr>
+            <a:r>
+              <a:rPr lang="en-GB" b="1" dirty="0"/>
+              <a:t>Area Under the Curve: </a:t>
+            </a:r>
+          </a:p>
+          <a:p>
+            <a:pPr marL="342900" indent="-342900" algn="l">
+              <a:buFont typeface="Arial" panose="020B0604020202020204" pitchFamily="34" charset="0"/>
+              <a:buChar char="•"/>
+            </a:pPr>
+            <a:r>
+              <a:rPr lang="en-GB" b="1" dirty="0"/>
+              <a:t>Calibration Curve Intercept: </a:t>
+            </a:r>
+          </a:p>
+          <a:p>
+            <a:pPr marL="342900" indent="-342900" algn="l">
+              <a:buFont typeface="Arial" panose="020B0604020202020204" pitchFamily="34" charset="0"/>
+              <a:buChar char="•"/>
+            </a:pPr>
+            <a:r>
+              <a:rPr lang="en-GB" b="1" dirty="0"/>
+              <a:t>Calibration Curve Slope: </a:t>
+            </a:r>
           </a:p>
         </p:txBody>
       </p:sp>
